--- a/PaolaCornejo_Examen_IE.pptx
+++ b/PaolaCornejo_Examen_IE.pptx
@@ -6784,6 +6784,10 @@
             <a:prstDash val="solid"/>
           </a:ln>
         </p:spPr>
+        <p:txBody>
+          <a:bodyPr/>
+          <a:p/>
+        </p:txBody>
       </p:sp>
       <p:sp>
         <p:nvSpPr>
@@ -6813,6 +6817,10 @@
             <a:prstDash val="solid"/>
           </a:ln>
         </p:spPr>
+        <p:txBody>
+          <a:bodyPr/>
+          <a:p/>
+        </p:txBody>
       </p:sp>
       <p:sp>
         <p:nvSpPr>
@@ -6842,6 +6850,10 @@
             <a:prstDash val="solid"/>
           </a:ln>
         </p:spPr>
+        <p:txBody>
+          <a:bodyPr/>
+          <a:p/>
+        </p:txBody>
       </p:sp>
       <p:sp>
         <p:nvSpPr>
@@ -6876,7 +6888,7 @@
                 <a:ea typeface="Arial" pitchFamily="34" charset="-122"/>
                 <a:cs typeface="Arial" pitchFamily="34" charset="-120"/>
               </a:rPr>
-              <a:t>IDEACIÓN · SCAMPER + IA</a:t>
+              <a:t>IDEACIÓN · SCAMPER + Enfoque Tradicional Optimizado</a:t>
             </a:r>
             <a:endParaRPr lang="en-US" sz="1100" dirty="0"/>
           </a:p>
@@ -6915,7 +6927,7 @@
                 <a:ea typeface="Arial" pitchFamily="34" charset="-122"/>
                 <a:cs typeface="Arial" pitchFamily="34" charset="-120"/>
               </a:rPr>
-              <a:t>3. La Solución — Microlearning inteligente</a:t>
+              <a:t>3. La Solución — Microlearning con casos reales</a:t>
             </a:r>
             <a:endParaRPr lang="en-US" sz="2600" dirty="0"/>
           </a:p>
@@ -6947,6 +6959,10 @@
             <a:prstDash val="solid"/>
           </a:ln>
         </p:spPr>
+        <p:txBody>
+          <a:bodyPr/>
+          <a:p/>
+        </p:txBody>
       </p:sp>
       <p:sp>
         <p:nvSpPr>
@@ -6981,7 +6997,7 @@
                 <a:ea typeface="Arial" pitchFamily="34" charset="-122"/>
                 <a:cs typeface="Arial" pitchFamily="34" charset="-120"/>
               </a:rPr>
-              <a:t>Idea núcleo: microcápsulas 3–5 min + IA + gamificación ligera + evaluación práctica inmediata.</a:t>
+              <a:t>Idea núcleo: Microcápsulas de 3–5 min + Casos multimedia de actores reales + Gamificación ligera + Evaluación práctica inmediata.</a:t>
             </a:r>
             <a:endParaRPr lang="en-US" sz="1400" dirty="0"/>
           </a:p>
@@ -7427,7 +7443,7 @@
                           <a:ea typeface="Arial" pitchFamily="34" charset="-122"/>
                           <a:cs typeface="Arial" pitchFamily="34" charset="-120"/>
                         </a:rPr>
-                        <a:t>Sustituir PDF/módulos largos por microcápsulas + avatar IA</a:t>
+                        <a:t>Sustituir manuales PDF y módulos largos por microcápsulas interactivas con videos de casos reales / dramatizaciones.</a:t>
                       </a:r>
                       <a:endParaRPr lang="en-US" sz="900" dirty="0">
                         <a:latin typeface="Arial" charset="0"/>
@@ -7474,7 +7490,7 @@
                           <a:ea typeface="Arial" pitchFamily="34" charset="-122"/>
                           <a:cs typeface="Arial" pitchFamily="34" charset="-120"/>
                         </a:rPr>
-                        <a:t>Combinar aprendizaje con flujo diario (intranet/correo)</a:t>
+                        <a:t>Combinar aprendizaje con flujo diario (intranet/correo) mediante píldoras formativas.</a:t>
                       </a:r>
                       <a:endParaRPr lang="en-US" sz="900" dirty="0">
                         <a:latin typeface="Arial" charset="0"/>
@@ -7521,7 +7537,7 @@
                           <a:ea typeface="Arial" pitchFamily="34" charset="-122"/>
                           <a:cs typeface="Arial" pitchFamily="34" charset="-120"/>
                         </a:rPr>
-                        <a:t>Adaptar gamificación ligera (progreso/insignias)</a:t>
+                        <a:t>Adaptar gamificación ligera (progreso/insignias) a cursos institucionales.</a:t>
                       </a:r>
                       <a:endParaRPr lang="en-US" sz="900" dirty="0">
                         <a:latin typeface="Arial" charset="0"/>
@@ -7568,7 +7584,7 @@
                           <a:ea typeface="Arial" pitchFamily="34" charset="-122"/>
                           <a:cs typeface="Arial" pitchFamily="34" charset="-120"/>
                         </a:rPr>
-                        <a:t>Modificar a rutas adaptativas según respuestas</a:t>
+                        <a:t>Modificar a rutas de decisión ramificadas según respuestas previas.</a:t>
                       </a:r>
                       <a:endParaRPr lang="en-US" sz="900" dirty="0">
                         <a:latin typeface="Arial" charset="0"/>
@@ -7615,7 +7631,7 @@
                           <a:ea typeface="Arial" pitchFamily="34" charset="-122"/>
                           <a:cs typeface="Arial" pitchFamily="34" charset="-120"/>
                         </a:rPr>
-                        <a:t>Otros usos: consulta just-in-time operativa</a:t>
+                        <a:t>Otros usos: consulta just-in-time de procedimientos operativos estandarizados.</a:t>
                       </a:r>
                       <a:endParaRPr lang="en-US" sz="900" dirty="0">
                         <a:latin typeface="Arial" charset="0"/>
@@ -7662,7 +7678,7 @@
                           <a:ea typeface="Arial" pitchFamily="34" charset="-122"/>
                           <a:cs typeface="Arial" pitchFamily="34" charset="-120"/>
                         </a:rPr>
-                        <a:t>Eliminar quizzes teóricos largos → práctica por cápsula</a:t>
+                        <a:t>Eliminar quizzes teóricos largos → práctica de resolución de casos por cápsula.</a:t>
                       </a:r>
                       <a:endParaRPr lang="en-US" sz="900" dirty="0">
                         <a:latin typeface="Arial" charset="0"/>
@@ -7709,7 +7725,7 @@
                           <a:ea typeface="Arial" pitchFamily="34" charset="-122"/>
                           <a:cs typeface="Arial" pitchFamily="34" charset="-120"/>
                         </a:rPr>
-                        <a:t>Reordenar: desafío práctico primero, teoría después</a:t>
+                        <a:t>Reordenar: desafío práctico primero, teoría después.</a:t>
                       </a:r>
                       <a:endParaRPr lang="en-US" sz="900" dirty="0">
                         <a:latin typeface="Arial" charset="0"/>
@@ -8082,7 +8098,7 @@
                           <a:ea typeface="Arial" pitchFamily="34" charset="-122"/>
                           <a:cs typeface="Arial" pitchFamily="34" charset="-120"/>
                         </a:rPr>
-                        <a:t>Microlearning + IA</a:t>
+                        <a:t>Microlearning + Casos Reales</a:t>
                       </a:r>
                       <a:endParaRPr lang="en-US" sz="1100" dirty="0">
                         <a:latin typeface="Arial" charset="0"/>
@@ -8223,7 +8239,7 @@
                           <a:ea typeface="Arial" pitchFamily="34" charset="-122"/>
                           <a:cs typeface="Arial" pitchFamily="34" charset="-120"/>
                         </a:rPr>
-                        <a:t>Avatares / generación asistida</a:t>
+                        <a:t>Videos / dramatizaciones de terreno</a:t>
                       </a:r>
                       <a:endParaRPr lang="en-US" sz="1100" dirty="0">
                         <a:latin typeface="Arial" charset="0"/>
@@ -8366,7 +8382,7 @@
                           <a:ea typeface="Arial" pitchFamily="34" charset="-122"/>
                           <a:cs typeface="Arial" pitchFamily="34" charset="-120"/>
                         </a:rPr>
-                        <a:t>Más motivación</a:t>
+                        <a:t>Más motivación y finalización</a:t>
                       </a:r>
                       <a:endParaRPr lang="en-US" sz="1100" dirty="0">
                         <a:latin typeface="Arial" charset="0"/>
@@ -8697,7 +8713,7 @@
                           <a:ea typeface="Arial" pitchFamily="34" charset="-122"/>
                           <a:cs typeface="Arial" pitchFamily="34" charset="-120"/>
                         </a:rPr>
-                        <a:t>Feedback contextual</a:t>
+                        <a:t>Feedback contextual y de pares</a:t>
                       </a:r>
                       <a:endParaRPr lang="en-US" sz="1100" dirty="0">
                         <a:latin typeface="Arial" charset="0"/>
@@ -8805,6 +8821,10 @@
             <a:prstDash val="solid"/>
           </a:ln>
         </p:spPr>
+        <p:txBody>
+          <a:bodyPr/>
+          <a:p/>
+        </p:txBody>
       </p:sp>
       <p:sp>
         <p:nvSpPr>
@@ -8839,7 +8859,7 @@
                 <a:ea typeface="Arial" pitchFamily="34" charset="-122"/>
                 <a:cs typeface="Arial" pitchFamily="34" charset="-120"/>
               </a:rPr>
-              <a:t>Trazabilidad IA (síntesis) · Gemini/ChatGPT</a:t>
+              <a:t>Enfoque tradicional optimizado</a:t>
             </a:r>
             <a:endParaRPr lang="en-US" sz="1200" dirty="0"/>
           </a:p>
@@ -8878,7 +8898,7 @@
                 <a:ea typeface="Arial" pitchFamily="34" charset="-122"/>
                 <a:cs typeface="Arial" pitchFamily="34" charset="-120"/>
               </a:rPr>
-              <a:t>Hallazgo: priorizar microlearning vs gamificación compleja. Decisión humana: micro + gamificación ligera. Riesgo IA: asumir plataforma propia → ajuste: integrar vía LMS/SCORM. 2ª interacción: barreras (tiempo, fatiga, irrelevancia) → cápsula ≤5 min + tiempo visible antes de empezar.</a:t>
+              <a:t>Priorizar microcápsulas con videos de casos reales / dramatizaciones y simulaciones ramificadas estáticas. Integración vía LMS/SCORM. Cápsula ≤5 min + tiempo visible antes de empezar. Sin plataforma propia ni avatares de IA.</a:t>
             </a:r>
             <a:endParaRPr lang="en-US" sz="1200" dirty="0"/>
           </a:p>
@@ -8972,6 +8992,10 @@
             <a:prstDash val="solid"/>
           </a:ln>
         </p:spPr>
+        <p:txBody>
+          <a:bodyPr/>
+          <a:p/>
+        </p:txBody>
       </p:sp>
       <p:sp>
         <p:nvSpPr>
@@ -9001,6 +9025,10 @@
             <a:prstDash val="solid"/>
           </a:ln>
         </p:spPr>
+        <p:txBody>
+          <a:bodyPr/>
+          <a:p/>
+        </p:txBody>
       </p:sp>
       <p:sp>
         <p:nvSpPr>
@@ -9030,6 +9058,10 @@
             <a:prstDash val="solid"/>
           </a:ln>
         </p:spPr>
+        <p:txBody>
+          <a:bodyPr/>
+          <a:p/>
+        </p:txBody>
       </p:sp>
       <p:sp>
         <p:nvSpPr>
@@ -9159,6 +9191,10 @@
             <a:prstDash val="solid"/>
           </a:ln>
         </p:spPr>
+        <p:txBody>
+          <a:bodyPr/>
+          <a:p/>
+        </p:txBody>
       </p:sp>
       <p:sp>
         <p:nvSpPr>
@@ -9271,7 +9307,7 @@
                 <a:ea typeface="Arial" pitchFamily="34" charset="-122"/>
                 <a:cs typeface="Arial" pitchFamily="34" charset="-120"/>
               </a:rPr>
-              <a:t>• 2 Aprendizaje — avatar + Solo audio</a:t>
+              <a:t>• 2 Aprendizaje — Video de caso real / dramatización + Solo audio</a:t>
             </a:r>
             <a:endParaRPr lang="en-US" sz="1200" dirty="0"/>
           </a:p>
@@ -9310,7 +9346,7 @@
                 <a:ea typeface="Arial" pitchFamily="34" charset="-122"/>
                 <a:cs typeface="Arial" pitchFamily="34" charset="-120"/>
               </a:rPr>
-              <a:t>• 3 Evaluación — botones táctiles</a:t>
+              <a:t>• 3 Evaluación — dilemas y decisiones (botones táctiles)</a:t>
             </a:r>
             <a:endParaRPr lang="en-US" sz="1200" dirty="0"/>
           </a:p>
@@ -9349,7 +9385,7 @@
                 <a:ea typeface="Arial" pitchFamily="34" charset="-122"/>
                 <a:cs typeface="Arial" pitchFamily="34" charset="-120"/>
               </a:rPr>
-              <a:t>• 4 Resultado — 100% + insignia</a:t>
+              <a:t>• 4 Resultado — 100% de avance + insignia obtenida</a:t>
             </a:r>
             <a:endParaRPr lang="en-US" sz="1200" dirty="0"/>
           </a:p>
@@ -9388,7 +9424,7 @@
                 <a:ea typeface="Arial" pitchFamily="34" charset="-122"/>
                 <a:cs typeface="Arial" pitchFamily="34" charset="-120"/>
               </a:rPr>
-              <a:t>• 5 Dashboard institucional</a:t>
+              <a:t>• 5 Dashboard institucional — métricas en tiempo real</a:t>
             </a:r>
             <a:endParaRPr lang="en-US" sz="1200" dirty="0"/>
           </a:p>
@@ -9427,7 +9463,7 @@
                 <a:ea typeface="Arial" pitchFamily="34" charset="-122"/>
                 <a:cs typeface="Arial" pitchFamily="34" charset="-120"/>
               </a:rPr>
-              <a:t>Ajuste vs testeo previo</a:t>
+              <a:t>Trazabilidad dolor → solución</a:t>
             </a:r>
             <a:endParaRPr lang="en-US" sz="1200" dirty="0"/>
           </a:p>
@@ -9466,7 +9502,7 @@
                 <a:ea typeface="Arial" pitchFamily="34" charset="-122"/>
                 <a:cs typeface="Arial" pitchFamily="34" charset="-120"/>
               </a:rPr>
-              <a:t>Se eliminó drag-and-drop; botones grandes + modo Solo audio + “Intentos ilimitados”.</a:t>
+              <a:t>Falta de tiempo → cápsula 3–5 min · Desmotivación → progreso + insignia · Baja retención → evaluación práctica por casos · Falta de seguimiento → dashboard institucional.</a:t>
             </a:r>
             <a:endParaRPr lang="en-US" sz="1200" dirty="0"/>
           </a:p>
@@ -9518,7 +9554,7 @@
                           <a:ea typeface="Arial" pitchFamily="34" charset="-122"/>
                           <a:cs typeface="Arial" pitchFamily="34" charset="-120"/>
                         </a:rPr>
-                        <a:t>Problema</a:t>
+                        <a:t>Dolor</a:t>
                       </a:r>
                       <a:endParaRPr lang="en-US" sz="1200" dirty="0">
                         <a:latin typeface="Arial" charset="0"/>
@@ -9568,7 +9604,7 @@
                           <a:ea typeface="Arial" pitchFamily="34" charset="-122"/>
                           <a:cs typeface="Arial" pitchFamily="34" charset="-120"/>
                         </a:rPr>
-                        <a:t>Insight usuario</a:t>
+                        <a:t>Insight</a:t>
                       </a:r>
                       <a:endParaRPr lang="en-US" sz="1200" dirty="0">
                         <a:latin typeface="Arial" charset="0"/>
@@ -9618,7 +9654,7 @@
                           <a:ea typeface="Arial" pitchFamily="34" charset="-122"/>
                           <a:cs typeface="Arial" pitchFamily="34" charset="-120"/>
                         </a:rPr>
-                        <a:t>Funcionalidad</a:t>
+                        <a:t>Solución SmartCaps</a:t>
                       </a:r>
                       <a:endParaRPr lang="en-US" sz="1200" dirty="0">
                         <a:latin typeface="Arial" charset="0"/>
@@ -9814,7 +9850,7 @@
                           <a:ea typeface="Arial" pitchFamily="34" charset="-122"/>
                           <a:cs typeface="Arial" pitchFamily="34" charset="-120"/>
                         </a:rPr>
-                        <a:t>Cápsula 3–5 min + tiempo visible</a:t>
+                        <a:t>Cápsula de 3–5 min + tiempo visible</a:t>
                       </a:r>
                       <a:endParaRPr lang="en-US" sz="1000" dirty="0">
                         <a:latin typeface="Arial" charset="0"/>
@@ -9861,7 +9897,7 @@
                           <a:ea typeface="Arial" pitchFamily="34" charset="-122"/>
                           <a:cs typeface="Arial" pitchFamily="34" charset="-120"/>
                         </a:rPr>
-                        <a:t>Evidencia testeo: brevedad gatilla interés</a:t>
+                        <a:t>Brevedad gatilla interés</a:t>
                       </a:r>
                       <a:endParaRPr lang="en-US" sz="1000" dirty="0">
                         <a:latin typeface="Arial" charset="0"/>
@@ -9910,7 +9946,7 @@
                           <a:ea typeface="Arial" pitchFamily="34" charset="-122"/>
                           <a:cs typeface="Arial" pitchFamily="34" charset="-120"/>
                         </a:rPr>
-                        <a:t>Baja retención / sin feedback</a:t>
+                        <a:t>Baja retención / desmotivación</a:t>
                       </a:r>
                       <a:endParaRPr lang="en-US" sz="1000" dirty="0">
                         <a:latin typeface="Arial" charset="0"/>
@@ -9957,7 +9993,7 @@
                           <a:ea typeface="Arial" pitchFamily="34" charset="-122"/>
                           <a:cs typeface="Arial" pitchFamily="34" charset="-120"/>
                         </a:rPr>
-                        <a:t>Olvida si es pasivo; necesita metas cortas</a:t>
+                        <a:t>Olvida si es pasivo; necesita metas cortas y casos reales</a:t>
                       </a:r>
                       <a:endParaRPr lang="en-US" sz="1000" dirty="0">
                         <a:latin typeface="Arial" charset="0"/>
@@ -10004,7 +10040,7 @@
                           <a:ea typeface="Arial" pitchFamily="34" charset="-122"/>
                           <a:cs typeface="Arial" pitchFamily="34" charset="-120"/>
                         </a:rPr>
-                        <a:t>Quiz práctico + insignia + dashboard</a:t>
+                        <a:t>Evaluación práctica por casos + progreso/insignia + dashboard</a:t>
                       </a:r>
                       <a:endParaRPr lang="en-US" sz="1000" dirty="0">
                         <a:latin typeface="Arial" charset="0"/>
@@ -10051,7 +10087,7 @@
                           <a:ea typeface="Arial" pitchFamily="34" charset="-122"/>
                           <a:cs typeface="Arial" pitchFamily="34" charset="-120"/>
                         </a:rPr>
-                        <a:t>Evidencia práctica activa / supuesto refuerzo visual</a:t>
+                        <a:t>Práctica activa y refuerzo visual</a:t>
                       </a:r>
                       <a:endParaRPr lang="en-US" sz="1000" dirty="0">
                         <a:latin typeface="Arial" charset="0"/>
@@ -10135,6 +10171,10 @@
             <a:prstDash val="solid"/>
           </a:ln>
         </p:spPr>
+        <p:txBody>
+          <a:bodyPr/>
+          <a:p/>
+        </p:txBody>
       </p:sp>
       <p:sp>
         <p:nvSpPr>
@@ -10164,6 +10204,10 @@
             <a:prstDash val="solid"/>
           </a:ln>
         </p:spPr>
+        <p:txBody>
+          <a:bodyPr/>
+          <a:p/>
+        </p:txBody>
       </p:sp>
       <p:sp>
         <p:nvSpPr>
@@ -10193,6 +10237,10 @@
             <a:prstDash val="solid"/>
           </a:ln>
         </p:spPr>
+        <p:txBody>
+          <a:bodyPr/>
+          <a:p/>
+        </p:txBody>
       </p:sp>
       <p:sp>
         <p:nvSpPr>
@@ -10298,6 +10346,10 @@
             <a:prstDash val="solid"/>
           </a:ln>
         </p:spPr>
+        <p:txBody>
+          <a:bodyPr/>
+          <a:p/>
+        </p:txBody>
       </p:sp>
       <p:sp>
         <p:nvSpPr>
@@ -10403,6 +10455,10 @@
             <a:prstDash val="solid"/>
           </a:ln>
         </p:spPr>
+        <p:txBody>
+          <a:bodyPr/>
+          <a:p/>
+        </p:txBody>
       </p:sp>
       <p:sp>
         <p:nvSpPr>
@@ -10508,6 +10564,10 @@
             <a:prstDash val="solid"/>
           </a:ln>
         </p:spPr>
+        <p:txBody>
+          <a:bodyPr/>
+          <a:p/>
+        </p:txBody>
       </p:sp>
       <p:sp>
         <p:nvSpPr>
@@ -10581,7 +10641,7 @@
                 <a:ea typeface="Arial" pitchFamily="34" charset="-122"/>
                 <a:cs typeface="Arial" pitchFamily="34" charset="-120"/>
               </a:rPr>
-              <a:t>Diseño instruccional, IA, multimedia, LMS/SCORM</a:t>
+              <a:t>Diseño instruccional experto, producción audiovisual, multimedia y LMS/SCORM</a:t>
             </a:r>
             <a:endParaRPr lang="en-US" sz="1100" dirty="0"/>
           </a:p>
@@ -10613,6 +10673,10 @@
             <a:prstDash val="solid"/>
           </a:ln>
         </p:spPr>
+        <p:txBody>
+          <a:bodyPr/>
+          <a:p/>
+        </p:txBody>
       </p:sp>
       <p:sp>
         <p:nvSpPr>
@@ -10686,7 +10750,7 @@
                 <a:ea typeface="Arial" pitchFamily="34" charset="-122"/>
                 <a:cs typeface="Arial" pitchFamily="34" charset="-120"/>
               </a:rPr>
-              <a:t>Capacitación breve, atractiva, medible y adaptable (microlearning + IA)</a:t>
+              <a:t>Capacitación breve, atractiva, medible y adaptable (microlearning con casos multimedia y simulaciones ramificadas)</a:t>
             </a:r>
             <a:endParaRPr lang="en-US" sz="1100" dirty="0"/>
           </a:p>
@@ -10718,6 +10782,10 @@
             <a:prstDash val="solid"/>
           </a:ln>
         </p:spPr>
+        <p:txBody>
+          <a:bodyPr/>
+          <a:p/>
+        </p:txBody>
       </p:sp>
       <p:sp>
         <p:nvSpPr>
@@ -10823,6 +10891,10 @@
             <a:prstDash val="solid"/>
           </a:ln>
         </p:spPr>
+        <p:txBody>
+          <a:bodyPr/>
+          <a:p/>
+        </p:txBody>
       </p:sp>
       <p:sp>
         <p:nvSpPr>
@@ -10928,6 +11000,10 @@
             <a:prstDash val="solid"/>
           </a:ln>
         </p:spPr>
+        <p:txBody>
+          <a:bodyPr/>
+          <a:p/>
+        </p:txBody>
       </p:sp>
       <p:sp>
         <p:nvSpPr>
@@ -11033,6 +11109,10 @@
             <a:prstDash val="solid"/>
           </a:ln>
         </p:spPr>
+        <p:txBody>
+          <a:bodyPr/>
+          <a:p/>
+        </p:txBody>
       </p:sp>
       <p:sp>
         <p:nvSpPr>
@@ -11106,7 +11186,7 @@
                 <a:ea typeface="Arial" pitchFamily="34" charset="-122"/>
                 <a:cs typeface="Arial" pitchFamily="34" charset="-120"/>
               </a:rPr>
-              <a:t>Personal, IA, producción AV, software, infraestructura y soporte</a:t>
+              <a:t>Personal académico, producción audiovisual (actores/videos), software, infraestructura y soporte</a:t>
             </a:r>
             <a:endParaRPr lang="en-US" sz="1100" dirty="0"/>
           </a:p>
@@ -11138,6 +11218,10 @@
             <a:prstDash val="solid"/>
           </a:ln>
         </p:spPr>
+        <p:txBody>
+          <a:bodyPr/>
+          <a:p/>
+        </p:txBody>
       </p:sp>
       <p:sp>
         <p:nvSpPr>
@@ -11243,6 +11327,10 @@
             <a:prstDash val="solid"/>
           </a:ln>
         </p:spPr>
+        <p:txBody>
+          <a:bodyPr/>
+          <a:p/>
+        </p:txBody>
       </p:sp>
       <p:sp>
         <p:nvSpPr>
@@ -11316,7 +11404,7 @@
                 <a:ea typeface="Arial" pitchFamily="34" charset="-122"/>
                 <a:cs typeface="Arial" pitchFamily="34" charset="-120"/>
               </a:rPr>
-              <a:t>Cliente institucional → dolor del aprendiz (tiempo / motivación / retención) → SmartCaps (micro + IA + evaluación + métricas)</a:t>
+              <a:t>Cliente institucional → dolor del aprendiz (tiempo / motivación / retención) → SmartCaps (micro + casos reales + evaluación + métricas)</a:t>
             </a:r>
             <a:endParaRPr lang="en-US" sz="1400" dirty="0"/>
           </a:p>
@@ -11348,6 +11436,10 @@
             <a:prstDash val="solid"/>
           </a:ln>
         </p:spPr>
+        <p:txBody>
+          <a:bodyPr/>
+          <a:p/>
+        </p:txBody>
       </p:sp>
       <p:sp>
         <p:nvSpPr>
@@ -11437,6 +11529,10 @@
             <a:prstDash val="solid"/>
           </a:ln>
         </p:spPr>
+        <p:txBody>
+          <a:bodyPr/>
+          <a:p/>
+        </p:txBody>
       </p:sp>
       <p:sp>
         <p:nvSpPr>
@@ -11466,6 +11562,10 @@
             <a:prstDash val="solid"/>
           </a:ln>
         </p:spPr>
+        <p:txBody>
+          <a:bodyPr/>
+          <a:p/>
+        </p:txBody>
       </p:sp>
       <p:sp>
         <p:nvSpPr>
@@ -11495,6 +11595,10 @@
             <a:prstDash val="solid"/>
           </a:ln>
         </p:spPr>
+        <p:txBody>
+          <a:bodyPr/>
+          <a:p/>
+        </p:txBody>
       </p:sp>
       <p:sp>
         <p:nvSpPr>
@@ -11600,6 +11704,10 @@
             <a:prstDash val="solid"/>
           </a:ln>
         </p:spPr>
+        <p:txBody>
+          <a:bodyPr/>
+          <a:p/>
+        </p:txBody>
       </p:sp>
       <p:sp>
         <p:nvSpPr>
@@ -11822,6 +11930,10 @@
             <a:prstDash val="solid"/>
           </a:ln>
         </p:spPr>
+        <p:txBody>
+          <a:bodyPr/>
+          <a:p/>
+        </p:txBody>
       </p:sp>
       <p:sp>
         <p:nvSpPr>
@@ -11973,7 +12085,7 @@
                 <a:ea typeface="Arial" pitchFamily="34" charset="-122"/>
                 <a:cs typeface="Arial" pitchFamily="34" charset="-120"/>
               </a:rPr>
-              <a:t>🤖  IA + interacción</a:t>
+              <a:t>🎬  Casos reales + interacción multimedia</a:t>
             </a:r>
             <a:endParaRPr lang="en-US" sz="1500" dirty="0"/>
           </a:p>
@@ -12122,6 +12234,10 @@
             <a:prstDash val="solid"/>
           </a:ln>
         </p:spPr>
+        <p:txBody>
+          <a:bodyPr/>
+          <a:p/>
+        </p:txBody>
       </p:sp>
       <p:sp>
         <p:nvSpPr>
@@ -12211,6 +12327,10 @@
             <a:prstDash val="solid"/>
           </a:ln>
         </p:spPr>
+        <p:txBody>
+          <a:bodyPr/>
+          <a:p/>
+        </p:txBody>
       </p:sp>
       <p:sp>
         <p:nvSpPr>
@@ -12240,6 +12360,10 @@
             <a:prstDash val="solid"/>
           </a:ln>
         </p:spPr>
+        <p:txBody>
+          <a:bodyPr/>
+          <a:p/>
+        </p:txBody>
       </p:sp>
       <p:sp>
         <p:nvSpPr>
@@ -12269,6 +12393,10 @@
             <a:prstDash val="solid"/>
           </a:ln>
         </p:spPr>
+        <p:txBody>
+          <a:bodyPr/>
+          <a:p/>
+        </p:txBody>
       </p:sp>
       <p:sp>
         <p:nvSpPr>
@@ -12374,6 +12502,10 @@
             <a:prstDash val="solid"/>
           </a:ln>
         </p:spPr>
+        <p:txBody>
+          <a:bodyPr/>
+          <a:p/>
+        </p:txBody>
       </p:sp>
       <p:sp>
         <p:nvSpPr>
@@ -12401,6 +12533,10 @@
             <a:prstDash val="solid"/>
           </a:ln>
         </p:spPr>
+        <p:txBody>
+          <a:bodyPr/>
+          <a:p/>
+        </p:txBody>
       </p:sp>
       <p:sp>
         <p:nvSpPr>
@@ -12513,7 +12649,7 @@
                 <a:ea typeface="Arial" pitchFamily="34" charset="-122"/>
                 <a:cs typeface="Arial" pitchFamily="34" charset="-120"/>
               </a:rPr>
-              <a:t>¿Cuánto conocimiento se pierde cuando una capacitación se completa solo porque es obligatoria?</a:t>
+              <a:t>¿Cuánto conocimiento se pierde cuando una capacitación corporativa u online se completa solo porque es obligatoria?</a:t>
             </a:r>
             <a:endParaRPr lang="en-US" sz="1300" dirty="0"/>
           </a:p>
@@ -12545,6 +12681,10 @@
             <a:prstDash val="solid"/>
           </a:ln>
         </p:spPr>
+        <p:txBody>
+          <a:bodyPr/>
+          <a:p/>
+        </p:txBody>
       </p:sp>
       <p:sp>
         <p:nvSpPr>
@@ -12572,6 +12712,10 @@
             <a:prstDash val="solid"/>
           </a:ln>
         </p:spPr>
+        <p:txBody>
+          <a:bodyPr/>
+          <a:p/>
+        </p:txBody>
       </p:sp>
       <p:sp>
         <p:nvSpPr>
@@ -12684,7 +12828,7 @@
                 <a:ea typeface="Arial" pitchFamily="34" charset="-122"/>
                 <a:cs typeface="Arial" pitchFamily="34" charset="-120"/>
               </a:rPr>
-              <a:t>SmartCaps transforma contenidos extensos en microcápsulas interactivas de 3–5 minutos.</a:t>
+              <a:t>SmartCaps transforma contenidos extensos en microcápsulas interactivas de 3–5 minutos basadas en escenarios y casos reales.</a:t>
             </a:r>
             <a:endParaRPr lang="en-US" sz="1300" dirty="0"/>
           </a:p>
@@ -12716,6 +12860,10 @@
             <a:prstDash val="solid"/>
           </a:ln>
         </p:spPr>
+        <p:txBody>
+          <a:bodyPr/>
+          <a:p/>
+        </p:txBody>
       </p:sp>
       <p:sp>
         <p:nvSpPr>
@@ -12743,6 +12891,10 @@
             <a:prstDash val="solid"/>
           </a:ln>
         </p:spPr>
+        <p:txBody>
+          <a:bodyPr/>
+          <a:p/>
+        </p:txBody>
       </p:sp>
       <p:sp>
         <p:nvSpPr>
@@ -12855,7 +13007,7 @@
                 <a:ea typeface="Arial" pitchFamily="34" charset="-122"/>
                 <a:cs typeface="Arial" pitchFamily="34" charset="-120"/>
               </a:rPr>
-              <a:t>IA + evaluación práctica + gamificación ligera: aprender sin detener la jornada y dar trazabilidad a la institución (LMS/SCORM).</a:t>
+              <a:t>Casos multimedia dinámicos + evaluación práctica + gamificación ligera: aprender sin detener la jornada y dar trazabilidad completa a la institución (vía LMS/SCORM).</a:t>
             </a:r>
             <a:endParaRPr lang="en-US" sz="1300" dirty="0"/>
           </a:p>
@@ -12887,6 +13039,10 @@
             <a:prstDash val="solid"/>
           </a:ln>
         </p:spPr>
+        <p:txBody>
+          <a:bodyPr/>
+          <a:p/>
+        </p:txBody>
       </p:sp>
       <p:sp>
         <p:nvSpPr>
@@ -12914,6 +13070,10 @@
             <a:prstDash val="solid"/>
           </a:ln>
         </p:spPr>
+        <p:txBody>
+          <a:bodyPr/>
+          <a:p/>
+        </p:txBody>
       </p:sp>
       <p:sp>
         <p:nvSpPr>
@@ -14149,6 +14309,10 @@
             <a:prstDash val="solid"/>
           </a:ln>
         </p:spPr>
+        <p:txBody>
+          <a:bodyPr/>
+          <a:p/>
+        </p:txBody>
       </p:sp>
       <p:sp>
         <p:nvSpPr>
@@ -14178,6 +14342,10 @@
             <a:prstDash val="solid"/>
           </a:ln>
         </p:spPr>
+        <p:txBody>
+          <a:bodyPr/>
+          <a:p/>
+        </p:txBody>
       </p:sp>
       <p:sp>
         <p:nvSpPr>
@@ -14207,6 +14375,10 @@
             <a:prstDash val="solid"/>
           </a:ln>
         </p:spPr>
+        <p:txBody>
+          <a:bodyPr/>
+          <a:p/>
+        </p:txBody>
       </p:sp>
       <p:sp>
         <p:nvSpPr>
@@ -14241,7 +14413,7 @@
                 <a:ea typeface="Arial" pitchFamily="34" charset="-122"/>
                 <a:cs typeface="Arial" pitchFamily="34" charset="-120"/>
               </a:rPr>
-              <a:t>ANEXO · PLANTILLA 5 CAMPOS</a:t>
+              <a:t>ANEXO · CRITERIOS DE DISEÑO</a:t>
             </a:r>
             <a:endParaRPr lang="en-US" sz="1100" dirty="0"/>
           </a:p>
@@ -14280,7 +14452,7 @@
                 <a:ea typeface="Arial" pitchFamily="34" charset="-122"/>
                 <a:cs typeface="Arial" pitchFamily="34" charset="-120"/>
               </a:rPr>
-              <a:t>9. Trazabilidad IA (2 interacciones)</a:t>
+              <a:t>9. Criterios de diseño y validación pedagógica</a:t>
             </a:r>
             <a:endParaRPr lang="en-US" sz="2600" dirty="0"/>
           </a:p>
@@ -14312,6 +14484,10 @@
             <a:prstDash val="solid"/>
           </a:ln>
         </p:spPr>
+        <p:txBody>
+          <a:bodyPr/>
+          <a:p/>
+        </p:txBody>
       </p:sp>
       <p:sp>
         <p:nvSpPr>
@@ -14346,7 +14522,7 @@
                 <a:ea typeface="Arial" pitchFamily="34" charset="-122"/>
                 <a:cs typeface="Arial" pitchFamily="34" charset="-120"/>
               </a:rPr>
-              <a:t>Interacción 1 — Gemini</a:t>
+              <a:t>Criterio 1 — Formato de contenido</a:t>
             </a:r>
             <a:endParaRPr lang="en-US" sz="1400" dirty="0"/>
           </a:p>
@@ -14385,7 +14561,7 @@
                 <a:ea typeface="Arial" pitchFamily="34" charset="-122"/>
                 <a:cs typeface="Arial" pitchFamily="34" charset="-120"/>
               </a:rPr>
-              <a:t>1. Objetivo: </a:t>
+              <a:t>Priorizar la inmersión mediante dramatizaciones en video de situaciones reales de terreno frente a la teoría estática, validando que el formato de 3 a 5 minutos disminuye la fatiga digital.</a:t>
             </a:r>
             <a:pPr indent="0" marL="0">
               <a:buNone/>
@@ -14399,8 +14575,7 @@
                 <a:ea typeface="Arial" pitchFamily="34" charset="-122"/>
                 <a:cs typeface="Arial" pitchFamily="34" charset="-120"/>
               </a:rPr>
-              <a:t>Comparar microlearning+IA vs gamificación robusta.
-</a:t>
+              <a:t/>
             </a:r>
             <a:pPr indent="0" marL="0">
               <a:buNone/>
@@ -14414,7 +14589,7 @@
                 <a:ea typeface="Arial" pitchFamily="34" charset="-122"/>
                 <a:cs typeface="Arial" pitchFamily="34" charset="-120"/>
               </a:rPr>
-              <a:t>2. Prompt: </a:t>
+              <a:t/>
             </a:r>
             <a:pPr indent="0" marL="0">
               <a:buNone/>
@@ -14428,8 +14603,7 @@
                 <a:ea typeface="Arial" pitchFamily="34" charset="-122"/>
                 <a:cs typeface="Arial" pitchFamily="34" charset="-120"/>
               </a:rPr>
-              <a:t>viabilidad, costos e impacto en retención.
-</a:t>
+              <a:t/>
             </a:r>
             <a:pPr indent="0" marL="0">
               <a:buNone/>
@@ -14443,7 +14617,7 @@
                 <a:ea typeface="Arial" pitchFamily="34" charset="-122"/>
                 <a:cs typeface="Arial" pitchFamily="34" charset="-120"/>
               </a:rPr>
-              <a:t>3. Salida: </a:t>
+              <a:t/>
             </a:r>
             <a:pPr indent="0" marL="0">
               <a:buNone/>
@@ -14457,8 +14631,7 @@
                 <a:ea typeface="Arial" pitchFamily="34" charset="-122"/>
                 <a:cs typeface="Arial" pitchFamily="34" charset="-120"/>
               </a:rPr>
-              <a:t>microlearning más rápido/económico a corto plazo; gamificación profunda más costosa.
-</a:t>
+              <a:t/>
             </a:r>
             <a:pPr indent="0" marL="0">
               <a:buNone/>
@@ -14472,7 +14645,7 @@
                 <a:ea typeface="Arial" pitchFamily="34" charset="-122"/>
                 <a:cs typeface="Arial" pitchFamily="34" charset="-120"/>
               </a:rPr>
-              <a:t>4. Decisión: </a:t>
+              <a:t/>
             </a:r>
             <a:pPr indent="0" marL="0">
               <a:buNone/>
@@ -14486,8 +14659,7 @@
                 <a:ea typeface="Arial" pitchFamily="34" charset="-122"/>
                 <a:cs typeface="Arial" pitchFamily="34" charset="-120"/>
               </a:rPr>
-              <a:t>núcleo = microlearning + gamificación ligera.
-</a:t>
+              <a:t/>
             </a:r>
             <a:pPr indent="0" marL="0">
               <a:buNone/>
@@ -14501,7 +14673,7 @@
                 <a:ea typeface="Arial" pitchFamily="34" charset="-122"/>
                 <a:cs typeface="Arial" pitchFamily="34" charset="-120"/>
               </a:rPr>
-              <a:t>5. Riesgo: </a:t>
+              <a:t/>
             </a:r>
             <a:pPr indent="0" marL="0">
               <a:buNone/>
@@ -14515,7 +14687,7 @@
                 <a:ea typeface="Arial" pitchFamily="34" charset="-122"/>
                 <a:cs typeface="Arial" pitchFamily="34" charset="-120"/>
               </a:rPr>
-              <a:t>IA asumió plataforma propia → ajuste LMS/SCORM.</a:t>
+              <a:t/>
             </a:r>
             <a:endParaRPr lang="en-US" sz="1200" dirty="0"/>
           </a:p>
@@ -14547,6 +14719,10 @@
             <a:prstDash val="solid"/>
           </a:ln>
         </p:spPr>
+        <p:txBody>
+          <a:bodyPr/>
+          <a:p/>
+        </p:txBody>
       </p:sp>
       <p:sp>
         <p:nvSpPr>
@@ -14581,7 +14757,7 @@
                 <a:ea typeface="Arial" pitchFamily="34" charset="-122"/>
                 <a:cs typeface="Arial" pitchFamily="34" charset="-120"/>
               </a:rPr>
-              <a:t>Interacción 2 — Gemini</a:t>
+              <a:t>Criterio 2 — Accesibilidad y compatibilidad</a:t>
             </a:r>
             <a:endParaRPr lang="en-US" sz="1400" dirty="0"/>
           </a:p>
@@ -14620,7 +14796,7 @@
                 <a:ea typeface="Arial" pitchFamily="34" charset="-122"/>
                 <a:cs typeface="Arial" pitchFamily="34" charset="-120"/>
               </a:rPr>
-              <a:t>1. Objetivo: </a:t>
+              <a:t>Asegurar que los componentes interactivos funcionen de forma nativa en plataformas LMS existentes (como Moodle o SAP) mediante paquetes SCORM estándar, sin requerir desarrollos tecnológicos complejos ni plataformas externas.</a:t>
             </a:r>
             <a:pPr indent="0" marL="0">
               <a:buNone/>
@@ -14634,8 +14810,7 @@
                 <a:ea typeface="Arial" pitchFamily="34" charset="-122"/>
                 <a:cs typeface="Arial" pitchFamily="34" charset="-120"/>
               </a:rPr>
-              <a:t>Barreras de adopción en colaboradores.
-</a:t>
+              <a:t/>
             </a:r>
             <a:pPr indent="0" marL="0">
               <a:buNone/>
@@ -14649,7 +14824,7 @@
                 <a:ea typeface="Arial" pitchFamily="34" charset="-122"/>
                 <a:cs typeface="Arial" pitchFamily="34" charset="-120"/>
               </a:rPr>
-              <a:t>2. Prompt: </a:t>
+              <a:t/>
             </a:r>
             <a:pPr indent="0" marL="0">
               <a:buNone/>
@@ -14663,8 +14838,7 @@
                 <a:ea typeface="Arial" pitchFamily="34" charset="-122"/>
                 <a:cs typeface="Arial" pitchFamily="34" charset="-120"/>
               </a:rPr>
-              <a:t>3 barreras + mitigaciones de experiencia.
-</a:t>
+              <a:t/>
             </a:r>
             <a:pPr indent="0" marL="0">
               <a:buNone/>
@@ -14678,7 +14852,7 @@
                 <a:ea typeface="Arial" pitchFamily="34" charset="-122"/>
                 <a:cs typeface="Arial" pitchFamily="34" charset="-120"/>
               </a:rPr>
-              <a:t>3. Salida: </a:t>
+              <a:t/>
             </a:r>
             <a:pPr indent="0" marL="0">
               <a:buNone/>
@@ -14692,8 +14866,7 @@
                 <a:ea typeface="Arial" pitchFamily="34" charset="-122"/>
                 <a:cs typeface="Arial" pitchFamily="34" charset="-120"/>
               </a:rPr>
-              <a:t>falta de tiempo, fatiga digital, irrelevancia percibida.
-</a:t>
+              <a:t/>
             </a:r>
             <a:pPr indent="0" marL="0">
               <a:buNone/>
@@ -14707,7 +14880,7 @@
                 <a:ea typeface="Arial" pitchFamily="34" charset="-122"/>
                 <a:cs typeface="Arial" pitchFamily="34" charset="-120"/>
               </a:rPr>
-              <a:t>4. Decisión: </a:t>
+              <a:t/>
             </a:r>
             <a:pPr indent="0" marL="0">
               <a:buNone/>
@@ -14721,8 +14894,7 @@
                 <a:ea typeface="Arial" pitchFamily="34" charset="-122"/>
                 <a:cs typeface="Arial" pitchFamily="34" charset="-120"/>
               </a:rPr>
-              <a:t>≤5 min + contenido desde un “dolor” operativo.
-</a:t>
+              <a:t/>
             </a:r>
             <a:pPr indent="0" marL="0">
               <a:buNone/>
@@ -14736,7 +14908,7 @@
                 <a:ea typeface="Arial" pitchFamily="34" charset="-122"/>
                 <a:cs typeface="Arial" pitchFamily="34" charset="-120"/>
               </a:rPr>
-              <a:t>5. Riesgo: </a:t>
+              <a:t/>
             </a:r>
             <a:pPr indent="0" marL="0">
               <a:buNone/>
@@ -14750,7 +14922,7 @@
                 <a:ea typeface="Arial" pitchFamily="34" charset="-122"/>
                 <a:cs typeface="Arial" pitchFamily="34" charset="-120"/>
               </a:rPr>
-              <a:t>mitigaciones teóricas → funcionalidad concreta: mostrar minutos antes de iniciar.</a:t>
+              <a:t/>
             </a:r>
             <a:endParaRPr lang="en-US" sz="1200" dirty="0"/>
           </a:p>

--- a/PaolaCornejo_Examen_IE.pptx
+++ b/PaolaCornejo_Examen_IE.pptx
@@ -1871,6 +1871,10 @@
             <a:prstDash val="solid"/>
           </a:ln>
         </p:spPr>
+        <p:txBody>
+          <a:bodyPr/>
+          <a:p/>
+        </p:txBody>
       </p:sp>
       <p:sp>
         <p:nvSpPr>
@@ -1900,6 +1904,10 @@
             <a:prstDash val="solid"/>
           </a:ln>
         </p:spPr>
+        <p:txBody>
+          <a:bodyPr/>
+          <a:p/>
+        </p:txBody>
       </p:sp>
       <p:sp>
         <p:nvSpPr>
@@ -1929,6 +1937,10 @@
             <a:prstDash val="solid"/>
           </a:ln>
         </p:spPr>
+        <p:txBody>
+          <a:bodyPr/>
+          <a:p/>
+        </p:txBody>
       </p:sp>
       <p:sp>
         <p:nvSpPr>
@@ -2034,6 +2046,10 @@
             <a:prstDash val="solid"/>
           </a:ln>
         </p:spPr>
+        <p:txBody>
+          <a:bodyPr/>
+          <a:p/>
+        </p:txBody>
       </p:sp>
       <p:sp>
         <p:nvSpPr>
@@ -2139,6 +2155,10 @@
             <a:prstDash val="solid"/>
           </a:ln>
         </p:spPr>
+        <p:txBody>
+          <a:bodyPr/>
+          <a:p/>
+        </p:txBody>
       </p:sp>
       <p:sp>
         <p:nvSpPr>
@@ -2244,6 +2264,10 @@
             <a:prstDash val="solid"/>
           </a:ln>
         </p:spPr>
+        <p:txBody>
+          <a:bodyPr/>
+          <a:p/>
+        </p:txBody>
       </p:sp>
       <p:sp>
         <p:nvSpPr>
@@ -2317,7 +2341,7 @@
                 <a:ea typeface="Arial" pitchFamily="34" charset="-122"/>
                 <a:cs typeface="Arial" pitchFamily="34" charset="-120"/>
               </a:rPr>
-              <a:t>Empresas · Universidades · OTEC · Organismos públicos.</a:t>
+              <a:t>Piloto propuesto: ACHS · IPLACEX · Municipalidad de Santiago · OTEC acreditadas SENCE.</a:t>
             </a:r>
             <a:endParaRPr lang="en-US" sz="1200" dirty="0"/>
           </a:p>
@@ -2349,6 +2373,10 @@
             <a:prstDash val="solid"/>
           </a:ln>
         </p:spPr>
+        <p:txBody>
+          <a:bodyPr/>
+          <a:p/>
+        </p:txBody>
       </p:sp>
       <p:sp>
         <p:nvSpPr>
@@ -2454,6 +2482,10 @@
             <a:prstDash val="solid"/>
           </a:ln>
         </p:spPr>
+        <p:txBody>
+          <a:bodyPr/>
+          <a:p/>
+        </p:txBody>
       </p:sp>
       <p:sp>
         <p:nvSpPr>
@@ -2527,7 +2559,7 @@
                 <a:ea typeface="Arial" pitchFamily="34" charset="-122"/>
                 <a:cs typeface="Arial" pitchFamily="34" charset="-120"/>
               </a:rPr>
-              <a:t>Usuario final, RRHH/capacitación, instituciones, TI y plataformas LMS.</a:t>
+              <a:t>Aprendiz final, RRHH/capacitación (ej. ACHS), IPLACEX, municipios y TI/LMS del cliente.</a:t>
             </a:r>
             <a:endParaRPr lang="en-US" sz="1200" dirty="0"/>
           </a:p>
@@ -2559,6 +2591,10 @@
             <a:prstDash val="solid"/>
           </a:ln>
         </p:spPr>
+        <p:txBody>
+          <a:bodyPr/>
+          <a:p/>
+        </p:txBody>
       </p:sp>
       <p:sp>
         <p:nvSpPr>
@@ -2664,6 +2700,10 @@
             <a:prstDash val="solid"/>
           </a:ln>
         </p:spPr>
+        <p:txBody>
+          <a:bodyPr/>
+          <a:p/>
+        </p:txBody>
       </p:sp>
       <p:sp>
         <p:nvSpPr>
@@ -4111,6 +4151,10 @@
             <a:prstDash val="solid"/>
           </a:ln>
         </p:spPr>
+        <p:txBody>
+          <a:bodyPr/>
+          <a:p/>
+        </p:txBody>
       </p:sp>
       <p:sp>
         <p:nvSpPr>
@@ -4140,6 +4184,10 @@
             <a:prstDash val="solid"/>
           </a:ln>
         </p:spPr>
+        <p:txBody>
+          <a:bodyPr/>
+          <a:p/>
+        </p:txBody>
       </p:sp>
       <p:sp>
         <p:nvSpPr>
@@ -4169,6 +4217,10 @@
             <a:prstDash val="solid"/>
           </a:ln>
         </p:spPr>
+        <p:txBody>
+          <a:bodyPr/>
+          <a:p/>
+        </p:txBody>
       </p:sp>
       <p:sp>
         <p:nvSpPr>
@@ -4203,7 +4255,7 @@
                 <a:ea typeface="Arial" pitchFamily="34" charset="-122"/>
                 <a:cs typeface="Arial" pitchFamily="34" charset="-120"/>
               </a:rPr>
-              <a:t>ANEXO · AUDITORÍA DEL PITCH CON IA</a:t>
+              <a:t>ANEXO · REVISIÓN DEL GUION</a:t>
             </a:r>
             <a:endParaRPr lang="en-US" sz="1100" dirty="0"/>
           </a:p>
@@ -4242,7 +4294,7 @@
                 <a:ea typeface="Arial" pitchFamily="34" charset="-122"/>
                 <a:cs typeface="Arial" pitchFamily="34" charset="-120"/>
               </a:rPr>
-              <a:t>11. Auditoría del guion AIDA</a:t>
+              <a:t>11. Revisión del guion AIDA (calidad oral)</a:t>
             </a:r>
             <a:endParaRPr lang="en-US" sz="2600" dirty="0"/>
           </a:p>
@@ -4274,6 +4326,10 @@
             <a:prstDash val="solid"/>
           </a:ln>
         </p:spPr>
+        <p:txBody>
+          <a:bodyPr/>
+          <a:p/>
+        </p:txBody>
       </p:sp>
       <p:sp>
         <p:nvSpPr>
@@ -4301,6 +4357,10 @@
             <a:prstDash val="solid"/>
           </a:ln>
         </p:spPr>
+        <p:txBody>
+          <a:bodyPr/>
+          <a:p/>
+        </p:txBody>
       </p:sp>
       <p:sp>
         <p:nvSpPr>
@@ -4335,7 +4395,7 @@
                 <a:ea typeface="Arial" pitchFamily="34" charset="-122"/>
                 <a:cs typeface="Arial" pitchFamily="34" charset="-120"/>
               </a:rPr>
-              <a:t>Herramienta</a:t>
+              <a:t>Método</a:t>
             </a:r>
             <a:endParaRPr lang="en-US" sz="1300" dirty="0"/>
           </a:p>
@@ -4374,7 +4434,7 @@
                 <a:ea typeface="Arial" pitchFamily="34" charset="-122"/>
                 <a:cs typeface="Arial" pitchFamily="34" charset="-120"/>
               </a:rPr>
-              <a:t>ChatGPT / Gemini (auditoría de síntesis y tono)</a:t>
+              <a:t>Criterios docentes + lectura en voz alta (cronómetro 1:50–2:15)</a:t>
             </a:r>
             <a:endParaRPr lang="en-US" sz="1200" dirty="0"/>
           </a:p>
@@ -4406,6 +4466,10 @@
             <a:prstDash val="solid"/>
           </a:ln>
         </p:spPr>
+        <p:txBody>
+          <a:bodyPr/>
+          <a:p/>
+        </p:txBody>
       </p:sp>
       <p:sp>
         <p:nvSpPr>
@@ -4433,6 +4497,10 @@
             <a:prstDash val="solid"/>
           </a:ln>
         </p:spPr>
+        <p:txBody>
+          <a:bodyPr/>
+          <a:p/>
+        </p:txBody>
       </p:sp>
       <p:sp>
         <p:nvSpPr>
@@ -4467,7 +4535,7 @@
                 <a:ea typeface="Arial" pitchFamily="34" charset="-122"/>
                 <a:cs typeface="Arial" pitchFamily="34" charset="-120"/>
               </a:rPr>
-              <a:t>Prompt</a:t>
+              <a:t>Checklist</a:t>
             </a:r>
             <a:endParaRPr lang="en-US" sz="1300" dirty="0"/>
           </a:p>
@@ -4506,7 +4574,7 @@
                 <a:ea typeface="Arial" pitchFamily="34" charset="-122"/>
                 <a:cs typeface="Arial" pitchFamily="34" charset="-120"/>
               </a:rPr>
-              <a:t>“Audita este elevator pitch AIDA de ≤2 min para SmartCaps/Laboratorio E-Learning: mejora gancho, empatía con arquetipo, claridad de valor, llamada a la acción y ritmo oral.”</a:t>
+              <a:t>Revisar: gancho, empatía con el aprendiz, valor sin IA/avatars, clientes concretos (ACHS/IPLACEX/Mun. Santiago), CTA de piloto y ritmo oral.</a:t>
             </a:r>
             <a:endParaRPr lang="en-US" sz="1200" dirty="0"/>
           </a:p>
@@ -4538,6 +4606,10 @@
             <a:prstDash val="solid"/>
           </a:ln>
         </p:spPr>
+        <p:txBody>
+          <a:bodyPr/>
+          <a:p/>
+        </p:txBody>
       </p:sp>
       <p:sp>
         <p:nvSpPr>
@@ -4565,6 +4637,10 @@
             <a:prstDash val="solid"/>
           </a:ln>
         </p:spPr>
+        <p:txBody>
+          <a:bodyPr/>
+          <a:p/>
+        </p:txBody>
       </p:sp>
       <p:sp>
         <p:nvSpPr>
@@ -4599,7 +4675,7 @@
                 <a:ea typeface="Arial" pitchFamily="34" charset="-122"/>
                 <a:cs typeface="Arial" pitchFamily="34" charset="-120"/>
               </a:rPr>
-              <a:t>Mejoras IA</a:t>
+              <a:t>Ajustes hechos</a:t>
             </a:r>
             <a:endParaRPr lang="en-US" sz="1300" dirty="0"/>
           </a:p>
@@ -4638,7 +4714,7 @@
                 <a:ea typeface="Arial" pitchFamily="34" charset="-122"/>
                 <a:cs typeface="Arial" pitchFamily="34" charset="-120"/>
               </a:rPr>
-              <a:t>Acortar frases; anclar el dolor en el aprendiz; explicitar LMS/SCORM; cerrar con piloto medible; evitar jerga.</a:t>
+              <a:t>Frases cortas; dolor del aprendiz; LMS/SCORM; clientes con nombre; cierre con piloto medible; sin jerga de IA.</a:t>
             </a:r>
             <a:endParaRPr lang="en-US" sz="1200" dirty="0"/>
           </a:p>
@@ -4670,6 +4746,10 @@
             <a:prstDash val="solid"/>
           </a:ln>
         </p:spPr>
+        <p:txBody>
+          <a:bodyPr/>
+          <a:p/>
+        </p:txBody>
       </p:sp>
       <p:sp>
         <p:nvSpPr>
@@ -4697,6 +4777,10 @@
             <a:prstDash val="solid"/>
           </a:ln>
         </p:spPr>
+        <p:txBody>
+          <a:bodyPr/>
+          <a:p/>
+        </p:txBody>
       </p:sp>
       <p:sp>
         <p:nvSpPr>
@@ -4770,7 +4854,7 @@
                 <a:ea typeface="Arial" pitchFamily="34" charset="-122"/>
                 <a:cs typeface="Arial" pitchFamily="34" charset="-120"/>
               </a:rPr>
-              <a:t>Intro IPLACEX obligatoria; gancho retórico; deseo con trazabilidad institucional; acción = piloto + métricas.</a:t>
+              <a:t>Intro IPLACEX; gancho retórico; deseo con casos reales + trazabilidad; acción = piloto ACHS + métricas; duración 1:50–2:15.</a:t>
             </a:r>
             <a:endParaRPr lang="en-US" sz="1200" dirty="0"/>
           </a:p>
@@ -4802,6 +4886,10 @@
             <a:prstDash val="solid"/>
           </a:ln>
         </p:spPr>
+        <p:txBody>
+          <a:bodyPr/>
+          <a:p/>
+        </p:txBody>
       </p:sp>
       <p:sp>
         <p:nvSpPr>
@@ -4829,6 +4917,10 @@
             <a:prstDash val="solid"/>
           </a:ln>
         </p:spPr>
+        <p:txBody>
+          <a:bodyPr/>
+          <a:p/>
+        </p:txBody>
       </p:sp>
       <p:sp>
         <p:nvSpPr>
@@ -4902,7 +4994,7 @@
                 <a:ea typeface="Arial" pitchFamily="34" charset="-122"/>
                 <a:cs typeface="Arial" pitchFamily="34" charset="-120"/>
               </a:rPr>
-              <a:t>Ver lámina 7 + archivo docs/guion-video-aida-2min.md</a:t>
+              <a:t>Ver lámina 7 + guion-video-aida-2min.md</a:t>
             </a:r>
             <a:endParaRPr lang="en-US" sz="1200" dirty="0"/>
           </a:p>
@@ -4957,6 +5049,10 @@
             <a:prstDash val="solid"/>
           </a:ln>
         </p:spPr>
+        <p:txBody>
+          <a:bodyPr/>
+          <a:p/>
+        </p:txBody>
       </p:sp>
       <p:sp>
         <p:nvSpPr>
@@ -4986,6 +5082,10 @@
             <a:prstDash val="solid"/>
           </a:ln>
         </p:spPr>
+        <p:txBody>
+          <a:bodyPr/>
+          <a:p/>
+        </p:txBody>
       </p:sp>
       <p:sp>
         <p:nvSpPr>
@@ -5015,6 +5115,10 @@
             <a:prstDash val="solid"/>
           </a:ln>
         </p:spPr>
+        <p:txBody>
+          <a:bodyPr/>
+          <a:p/>
+        </p:txBody>
       </p:sp>
       <p:sp>
         <p:nvSpPr>
@@ -5120,6 +5224,10 @@
             <a:prstDash val="solid"/>
           </a:ln>
         </p:spPr>
+        <p:txBody>
+          <a:bodyPr/>
+          <a:p/>
+        </p:txBody>
       </p:sp>
       <p:sp>
         <p:nvSpPr>
@@ -5186,6 +5294,10 @@
             <a:prstDash val="solid"/>
           </a:ln>
         </p:spPr>
+        <p:txBody>
+          <a:bodyPr/>
+          <a:p/>
+        </p:txBody>
       </p:sp>
       <p:sp>
         <p:nvSpPr>
@@ -5220,7 +5332,7 @@
                 <a:ea typeface="Arial" pitchFamily="34" charset="-122"/>
                 <a:cs typeface="Arial" pitchFamily="34" charset="-120"/>
               </a:rPr>
-              <a:t>☐  Video ≤ 2 min — nombre: PaolaCornejo_Video_Examen_IE</a:t>
+              <a:t>☐  Video 1:50–2:15 — nombre: PaolaCornejo_Video_Examen_IE</a:t>
             </a:r>
             <a:endParaRPr lang="en-US" sz="1300" dirty="0"/>
           </a:p>
@@ -5252,6 +5364,10 @@
             <a:prstDash val="solid"/>
           </a:ln>
         </p:spPr>
+        <p:txBody>
+          <a:bodyPr/>
+          <a:p/>
+        </p:txBody>
       </p:sp>
       <p:sp>
         <p:nvSpPr>
@@ -5318,6 +5434,10 @@
             <a:prstDash val="solid"/>
           </a:ln>
         </p:spPr>
+        <p:txBody>
+          <a:bodyPr/>
+          <a:p/>
+        </p:txBody>
       </p:sp>
       <p:sp>
         <p:nvSpPr>
@@ -5352,7 +5472,7 @@
                 <a:ea typeface="Arial" pitchFamily="34" charset="-122"/>
                 <a:cs typeface="Arial" pitchFamily="34" charset="-120"/>
               </a:rPr>
-              <a:t>☐  Estructura AIDA · grabación continua sin cortes · horizontal ≥720p</a:t>
+              <a:t>☐  Estructura AIDA · continuo · ≥720p · SIN IA/avatars · 1:50–2:15</a:t>
             </a:r>
             <a:endParaRPr lang="en-US" sz="1300" dirty="0"/>
           </a:p>
@@ -5384,6 +5504,10 @@
             <a:prstDash val="solid"/>
           </a:ln>
         </p:spPr>
+        <p:txBody>
+          <a:bodyPr/>
+          <a:p/>
+        </p:txBody>
       </p:sp>
       <p:sp>
         <p:nvSpPr>
@@ -5450,6 +5574,10 @@
             <a:prstDash val="solid"/>
           </a:ln>
         </p:spPr>
+        <p:txBody>
+          <a:bodyPr/>
+          <a:p/>
+        </p:txBody>
       </p:sp>
       <p:sp>
         <p:nvSpPr>
@@ -5516,6 +5644,10 @@
             <a:prstDash val="solid"/>
           </a:ln>
         </p:spPr>
+        <p:txBody>
+          <a:bodyPr/>
+          <a:p/>
+        </p:txBody>
       </p:sp>
       <p:sp>
         <p:nvSpPr>
@@ -5582,6 +5714,10 @@
             <a:prstDash val="solid"/>
           </a:ln>
         </p:spPr>
+        <p:txBody>
+          <a:bodyPr/>
+          <a:p/>
+        </p:txBody>
       </p:sp>
       <p:sp>
         <p:nvSpPr>
@@ -8898,7 +9034,7 @@
                 <a:ea typeface="Arial" pitchFamily="34" charset="-122"/>
                 <a:cs typeface="Arial" pitchFamily="34" charset="-120"/>
               </a:rPr>
-              <a:t>Priorizar microcápsulas con videos de casos reales / dramatizaciones y simulaciones ramificadas estáticas. Integración vía LMS/SCORM. Cápsula ≤5 min + tiempo visible antes de empezar. Sin plataforma propia ni avatares de IA.</a:t>
+              <a:t>Priorizar microcápsulas con videos de casos reales / dramatizaciones y simulaciones ramificadas. Integración vía LMS/SCORM. Cápsula ≤5 min + tiempo visible. Sin avatares inteligentes ni plataforma propia.</a:t>
             </a:r>
             <a:endParaRPr lang="en-US" sz="1200" dirty="0"/>
           </a:p>
@@ -9141,30 +9277,6 @@
           </a:p>
         </p:txBody>
       </p:sp>
-      <p:pic>
-        <p:nvPicPr>
-          <p:cNvPr id="7" name="Image 0" descr="/Users/javierpinochetmaureira/Downloads/laboratorio-elearning-prototipo/docs/mockups/lamina-4-16x9.png">    </p:cNvPr>
-          <p:cNvPicPr>
-            <a:picLocks noChangeAspect="1"/>
-          </p:cNvPicPr>
-          <p:nvPr/>
-        </p:nvPicPr>
-        <p:blipFill>
-          <a:blip r:embed="rId1"/>
-          <a:stretch>
-            <a:fillRect/>
-          </a:stretch>
-        </p:blipFill>
-        <p:spPr>
-          <a:xfrm>
-            <a:off x="274320" y="822960"/>
-            <a:ext cx="7589520" cy="4261104"/>
-          </a:xfrm>
-          <a:prstGeom prst="rect">
-            <a:avLst/>
-          </a:prstGeom>
-        </p:spPr>
-      </p:pic>
       <p:sp>
         <p:nvSpPr>
           <p:cNvPr id="8" name="Shape 5"/>
@@ -10122,6 +10234,30 @@
           </a:graphicData>
         </a:graphic>
       </p:graphicFrame>
+      <p:pic>
+        <p:nvPicPr>
+          <p:cNvPr id="17" name="Picture 16" descr="mockup-prototipo-slide4.png"/>
+          <p:cNvPicPr>
+            <a:picLocks noChangeAspect="1"/>
+          </p:cNvPicPr>
+          <p:nvPr/>
+        </p:nvPicPr>
+        <p:blipFill>
+          <a:blip r:embed="rId4"/>
+          <a:stretch>
+            <a:fillRect/>
+          </a:stretch>
+        </p:blipFill>
+        <p:spPr>
+          <a:xfrm>
+            <a:off x="274320" y="822960"/>
+            <a:ext cx="7589520" cy="4261104"/>
+          </a:xfrm>
+          <a:prstGeom prst="rect">
+            <a:avLst/>
+          </a:prstGeom>
+        </p:spPr>
+      </p:pic>
     </p:spTree>
   </p:cSld>
   <p:clrMapOvr>
@@ -10423,7 +10559,7 @@
                 <a:ea typeface="Arial" pitchFamily="34" charset="-122"/>
                 <a:cs typeface="Arial" pitchFamily="34" charset="-120"/>
               </a:rPr>
-              <a:t>Proveedores tech, LMS, especialistas, instituciones educativas</a:t>
+              <a:t>LMS (Moodle/SAP), productoras AV, IPLACEX, mutuales (ej. ACHS) y municipios</a:t>
             </a:r>
             <a:endParaRPr lang="en-US" sz="1100" dirty="0"/>
           </a:p>
@@ -11077,7 +11213,7 @@
                 <a:ea typeface="Arial" pitchFamily="34" charset="-122"/>
                 <a:cs typeface="Arial" pitchFamily="34" charset="-120"/>
               </a:rPr>
-              <a:t>Empresas, universidades, OTEC y organismos públicos</a:t>
+              <a:t>ACHS · IPLACEX · Municipalidad de Santiago · OTEC acreditadas SENCE</a:t>
             </a:r>
             <a:endParaRPr lang="en-US" sz="1100" dirty="0"/>
           </a:p>
@@ -12431,7 +12567,7 @@
                 <a:ea typeface="Arial" pitchFamily="34" charset="-122"/>
                 <a:cs typeface="Arial" pitchFamily="34" charset="-120"/>
               </a:rPr>
-              <a:t>ELEVATOR PITCH · ≤ 2 MIN</a:t>
+              <a:t>ELEVATOR PITCH · 1:50–2:15</a:t>
             </a:r>
             <a:endParaRPr lang="en-US" sz="1100" dirty="0"/>
           </a:p>
@@ -13225,7 +13361,7 @@
                 <a:ea typeface="Arial" pitchFamily="34" charset="-122"/>
                 <a:cs typeface="Arial" pitchFamily="34" charset="-120"/>
               </a:rPr>
-              <a:t>Video OneDrive (IPLACEX): [PEGAR ENLACE AQUÍ]  ·  Archivo: PaolaCornejo_Video_Examen_IE  ·  Intro: Paola Carmen Cornejo Carlevarino</a:t>
+              <a:t>Video OneDrive (IPLACEX): [PEGAR ENLACE] · 1:50–2:15 máx. · Archivo: PaolaCornejo_Video_Examen_IE · Intro: Paola Carmen Cornejo Carlevarino</a:t>
             </a:r>
             <a:endParaRPr lang="en-US" sz="1000" dirty="0"/>
           </a:p>
@@ -13610,7 +13746,7 @@
                           <a:ea typeface="Arial" pitchFamily="34" charset="-122"/>
                           <a:cs typeface="Arial" pitchFamily="34" charset="-120"/>
                         </a:rPr>
-                        <a:t>Sustituir manuales PDF y módulos largos por microcápsulas interactivas con avatar IA.</a:t>
+                        <a:t>Sustituir manuales PDF y módulos largos por microcápsulas interactivas con videos de casos reales / dramatizaciones.</a:t>
                       </a:r>
                       <a:endParaRPr lang="en-US" sz="1300" dirty="0">
                         <a:latin typeface="Arial" charset="0"/>
@@ -13898,7 +14034,7 @@
                           <a:ea typeface="Arial" pitchFamily="34" charset="-122"/>
                           <a:cs typeface="Arial" pitchFamily="34" charset="-120"/>
                         </a:rPr>
-                        <a:t>Pasar de diseño estático a rutas adaptativas según respuestas previas.</a:t>
+                        <a:t>Pasar de diseño estático a rutas de decisión ramificadas según respuestas previas.</a:t>
                       </a:r>
                       <a:endParaRPr lang="en-US" sz="1300" dirty="0">
                         <a:latin typeface="Arial" charset="0"/>
